--- a/module-02-environments/slides/Week2_EnvMgmt_Bioinformatics.pptx
+++ b/module-02-environments/slides/Week2_EnvMgmt_Bioinformatics.pptx
@@ -5,7 +5,7 @@
     <p:sldMasterId id="2147483648" r:id="rId1"/>
   </p:sldMasterIdLst>
   <p:notesMasterIdLst>
-    <p:notesMasterId r:id="rId12"/>
+    <p:notesMasterId r:id="rId13"/>
   </p:notesMasterIdLst>
   <p:sldIdLst>
     <p:sldId id="256" r:id="rId2"/>
@@ -16,8 +16,9 @@
     <p:sldId id="261" r:id="rId7"/>
     <p:sldId id="262" r:id="rId8"/>
     <p:sldId id="263" r:id="rId9"/>
-    <p:sldId id="264" r:id="rId10"/>
-    <p:sldId id="265" r:id="rId11"/>
+    <p:sldId id="266" r:id="rId10"/>
+    <p:sldId id="264" r:id="rId11"/>
+    <p:sldId id="265" r:id="rId12"/>
   </p:sldIdLst>
   <p:sldSz cx="12192000" cy="6858000"/>
   <p:notesSz cx="6858000" cy="9144000"/>
@@ -9476,7 +9477,7 @@
           <a:p>
             <a:fld id="{5BCAD085-E8A6-8845-BD4E-CB4CCA059FC4}" type="datetimeFigureOut">
               <a:rPr lang="en-US" smtClean="0"/>
-              <a:t>9/22/25</a:t>
+              <a:t>9/29/25</a:t>
             </a:fld>
             <a:endParaRPr lang="en-US"/>
           </a:p>
@@ -9644,7 +9645,7 @@
           <a:p>
             <a:fld id="{5BCAD085-E8A6-8845-BD4E-CB4CCA059FC4}" type="datetimeFigureOut">
               <a:rPr lang="en-US" smtClean="0"/>
-              <a:t>9/22/25</a:t>
+              <a:t>9/29/25</a:t>
             </a:fld>
             <a:endParaRPr lang="en-US"/>
           </a:p>
@@ -9822,7 +9823,7 @@
           <a:p>
             <a:fld id="{5BCAD085-E8A6-8845-BD4E-CB4CCA059FC4}" type="datetimeFigureOut">
               <a:rPr lang="en-US" smtClean="0"/>
-              <a:t>9/22/25</a:t>
+              <a:t>9/29/25</a:t>
             </a:fld>
             <a:endParaRPr lang="en-US"/>
           </a:p>
@@ -9990,7 +9991,7 @@
           <a:p>
             <a:fld id="{5BCAD085-E8A6-8845-BD4E-CB4CCA059FC4}" type="datetimeFigureOut">
               <a:rPr lang="en-US" smtClean="0"/>
-              <a:t>9/22/25</a:t>
+              <a:t>9/29/25</a:t>
             </a:fld>
             <a:endParaRPr lang="en-US"/>
           </a:p>
@@ -10235,7 +10236,7 @@
           <a:p>
             <a:fld id="{5BCAD085-E8A6-8845-BD4E-CB4CCA059FC4}" type="datetimeFigureOut">
               <a:rPr lang="en-US" smtClean="0"/>
-              <a:t>9/22/25</a:t>
+              <a:t>9/29/25</a:t>
             </a:fld>
             <a:endParaRPr lang="en-US"/>
           </a:p>
@@ -10520,7 +10521,7 @@
           <a:p>
             <a:fld id="{5BCAD085-E8A6-8845-BD4E-CB4CCA059FC4}" type="datetimeFigureOut">
               <a:rPr lang="en-US" smtClean="0"/>
-              <a:t>9/22/25</a:t>
+              <a:t>9/29/25</a:t>
             </a:fld>
             <a:endParaRPr lang="en-US"/>
           </a:p>
@@ -10939,7 +10940,7 @@
           <a:p>
             <a:fld id="{5BCAD085-E8A6-8845-BD4E-CB4CCA059FC4}" type="datetimeFigureOut">
               <a:rPr lang="en-US" smtClean="0"/>
-              <a:t>9/22/25</a:t>
+              <a:t>9/29/25</a:t>
             </a:fld>
             <a:endParaRPr lang="en-US"/>
           </a:p>
@@ -11056,7 +11057,7 @@
           <a:p>
             <a:fld id="{5BCAD085-E8A6-8845-BD4E-CB4CCA059FC4}" type="datetimeFigureOut">
               <a:rPr lang="en-US" smtClean="0"/>
-              <a:t>9/22/25</a:t>
+              <a:t>9/29/25</a:t>
             </a:fld>
             <a:endParaRPr lang="en-US"/>
           </a:p>
@@ -11151,7 +11152,7 @@
           <a:p>
             <a:fld id="{5BCAD085-E8A6-8845-BD4E-CB4CCA059FC4}" type="datetimeFigureOut">
               <a:rPr lang="en-US" smtClean="0"/>
-              <a:t>9/22/25</a:t>
+              <a:t>9/29/25</a:t>
             </a:fld>
             <a:endParaRPr lang="en-US"/>
           </a:p>
@@ -11426,7 +11427,7 @@
           <a:p>
             <a:fld id="{5BCAD085-E8A6-8845-BD4E-CB4CCA059FC4}" type="datetimeFigureOut">
               <a:rPr lang="en-US" smtClean="0"/>
-              <a:t>9/22/25</a:t>
+              <a:t>9/29/25</a:t>
             </a:fld>
             <a:endParaRPr lang="en-US"/>
           </a:p>
@@ -11678,7 +11679,7 @@
           <a:p>
             <a:fld id="{5BCAD085-E8A6-8845-BD4E-CB4CCA059FC4}" type="datetimeFigureOut">
               <a:rPr lang="en-US" smtClean="0"/>
-              <a:t>9/22/25</a:t>
+              <a:t>9/29/25</a:t>
             </a:fld>
             <a:endParaRPr lang="en-US"/>
           </a:p>
@@ -11889,7 +11890,7 @@
           <a:p>
             <a:fld id="{5BCAD085-E8A6-8845-BD4E-CB4CCA059FC4}" type="datetimeFigureOut">
               <a:rPr lang="en-US" smtClean="0"/>
-              <a:t>9/22/25</a:t>
+              <a:t>9/29/25</a:t>
             </a:fld>
             <a:endParaRPr lang="en-US"/>
           </a:p>
@@ -12555,7 +12556,7 @@
               </a:defRPr>
             </a:pPr>
             <a:r>
-              <a:t>Export &amp; Share + Assignment</a:t>
+              <a:t>Docker Demo (Hands-on)</a:t>
             </a:r>
           </a:p>
         </p:txBody>
@@ -12591,7 +12592,7 @@
               </a:defRPr>
             </a:pPr>
             <a:r>
-              <a:t>Export concise env YAMLs; optionally full lockfiles</a:t>
+              <a:t>Pull and run a base image</a:t>
             </a:r>
           </a:p>
           <a:p>
@@ -12604,7 +12605,7 @@
               </a:defRPr>
             </a:pPr>
             <a:r>
-              <a:t>Recreate envs from YAML for reproducibility</a:t>
+              <a:t>Install tools in container, verify versions</a:t>
             </a:r>
           </a:p>
           <a:p>
@@ -12617,7 +12618,7 @@
               </a:defRPr>
             </a:pPr>
             <a:r>
-              <a:t>Assignment: 3 envs (QC, assembly, annotation) + README + logs</a:t>
+              <a:t>Build minimal image; mount volumes for data</a:t>
             </a:r>
           </a:p>
         </p:txBody>
@@ -12675,6 +12676,393 @@
         <p:spPr>
           <a:xfrm>
             <a:off x="1005840" y="3291840"/>
+            <a:ext cx="10454335" cy="2800767"/>
+          </a:xfrm>
+          <a:prstGeom prst="rect">
+            <a:avLst/>
+          </a:prstGeom>
+          <a:noFill/>
+        </p:spPr>
+        <p:txBody>
+          <a:bodyPr wrap="square">
+            <a:spAutoFit/>
+          </a:bodyPr>
+          <a:lstStyle/>
+          <a:p>
+            <a:pPr>
+              <a:defRPr sz="1600">
+                <a:solidFill>
+                  <a:srgbClr val="ECF1F7"/>
+                </a:solidFill>
+                <a:latin typeface="Consolas"/>
+              </a:defRPr>
+            </a:pPr>
+            <a:r>
+              <a:rPr dirty="0"/>
+              <a:t># Check Docker and pull Ubuntu</a:t>
+            </a:r>
+            <a:br>
+              <a:rPr dirty="0"/>
+            </a:br>
+            <a:r>
+              <a:rPr dirty="0"/>
+              <a:t>docker --version</a:t>
+            </a:r>
+            <a:br>
+              <a:rPr dirty="0"/>
+            </a:br>
+            <a:r>
+              <a:rPr dirty="0"/>
+              <a:t>docker pull ubuntu:22.04</a:t>
+            </a:r>
+            <a:br>
+              <a:rPr dirty="0"/>
+            </a:br>
+            <a:r>
+              <a:rPr dirty="0"/>
+              <a:t>docker run --rm -it ubuntu:22.04 bash</a:t>
+            </a:r>
+            <a:br>
+              <a:rPr dirty="0"/>
+            </a:br>
+            <a:br>
+              <a:rPr dirty="0"/>
+            </a:br>
+            <a:r>
+              <a:rPr dirty="0"/>
+              <a:t># Inside container (demo install):</a:t>
+            </a:r>
+            <a:br>
+              <a:rPr dirty="0"/>
+            </a:br>
+            <a:r>
+              <a:rPr dirty="0"/>
+              <a:t>apt-get update</a:t>
+            </a:r>
+            <a:br>
+              <a:rPr dirty="0"/>
+            </a:br>
+            <a:r>
+              <a:rPr dirty="0"/>
+              <a:t>DEBIAN_FRONTEND=noninteractive apt-get install -y </a:t>
+            </a:r>
+            <a:r>
+              <a:rPr dirty="0" err="1"/>
+              <a:t>fastqc</a:t>
+            </a:r>
+            <a:r>
+              <a:rPr dirty="0"/>
+              <a:t> bwa </a:t>
+            </a:r>
+            <a:r>
+              <a:rPr dirty="0" err="1"/>
+              <a:t>samtools</a:t>
+            </a:r>
+            <a:r>
+              <a:rPr dirty="0"/>
+              <a:t> default-</a:t>
+            </a:r>
+            <a:r>
+              <a:rPr dirty="0" err="1"/>
+              <a:t>jre</a:t>
+            </a:r>
+            <a:br>
+              <a:rPr dirty="0"/>
+            </a:br>
+            <a:r>
+              <a:rPr dirty="0" err="1"/>
+              <a:t>fastqc</a:t>
+            </a:r>
+            <a:r>
+              <a:rPr dirty="0"/>
+              <a:t> --version; bwa 2&gt;&amp;1 | head -n 1; </a:t>
+            </a:r>
+            <a:r>
+              <a:rPr dirty="0" err="1"/>
+              <a:t>samtools</a:t>
+            </a:r>
+            <a:r>
+              <a:rPr dirty="0"/>
+              <a:t> --version | head -n 1</a:t>
+            </a:r>
+            <a:br>
+              <a:rPr dirty="0"/>
+            </a:br>
+            <a:r>
+              <a:rPr dirty="0"/>
+              <a:t>exit</a:t>
+            </a:r>
+            <a:br>
+              <a:rPr dirty="0"/>
+            </a:br>
+            <a:endParaRPr dirty="0"/>
+          </a:p>
+        </p:txBody>
+      </p:sp>
+    </p:spTree>
+  </p:cSld>
+  <p:clrMapOvr>
+    <a:masterClrMapping/>
+  </p:clrMapOvr>
+</p:sld>
+</file>
+
+<file path=ppt/slides/slide11.xml><?xml version="1.0" encoding="utf-8"?>
+<p:sld xmlns:a="http://schemas.openxmlformats.org/drawingml/2006/main" xmlns:r="http://schemas.openxmlformats.org/officeDocument/2006/relationships" xmlns:p="http://schemas.openxmlformats.org/presentationml/2006/main">
+  <p:cSld>
+    <p:spTree>
+      <p:nvGrpSpPr>
+        <p:cNvPr id="1" name=""/>
+        <p:cNvGrpSpPr/>
+        <p:nvPr/>
+      </p:nvGrpSpPr>
+      <p:grpSpPr>
+        <a:xfrm>
+          <a:off x="0" y="0"/>
+          <a:ext cx="0" cy="0"/>
+          <a:chOff x="0" y="0"/>
+          <a:chExt cx="0" cy="0"/>
+        </a:xfrm>
+      </p:grpSpPr>
+      <p:sp>
+        <p:nvSpPr>
+          <p:cNvPr id="2" name="Rectangle 1"/>
+          <p:cNvSpPr/>
+          <p:nvPr/>
+        </p:nvSpPr>
+        <p:spPr>
+          <a:xfrm>
+            <a:off x="0" y="0"/>
+            <a:ext cx="411480" cy="6858000"/>
+          </a:xfrm>
+          <a:prstGeom prst="rect">
+            <a:avLst/>
+          </a:prstGeom>
+          <a:solidFill>
+            <a:srgbClr val="2A9D8F"/>
+          </a:solidFill>
+          <a:ln>
+            <a:noFill/>
+          </a:ln>
+        </p:spPr>
+        <p:style>
+          <a:lnRef idx="1">
+            <a:schemeClr val="accent1"/>
+          </a:lnRef>
+          <a:fillRef idx="3">
+            <a:schemeClr val="accent1"/>
+          </a:fillRef>
+          <a:effectRef idx="2">
+            <a:schemeClr val="accent1"/>
+          </a:effectRef>
+          <a:fontRef idx="minor">
+            <a:schemeClr val="lt1"/>
+          </a:fontRef>
+        </p:style>
+        <p:txBody>
+          <a:bodyPr rtlCol="0" anchor="ctr"/>
+          <a:lstStyle/>
+          <a:p>
+            <a:pPr algn="ctr"/>
+            <a:endParaRPr/>
+          </a:p>
+        </p:txBody>
+      </p:sp>
+      <p:sp>
+        <p:nvSpPr>
+          <p:cNvPr id="3" name="Rectangle 2"/>
+          <p:cNvSpPr/>
+          <p:nvPr/>
+        </p:nvSpPr>
+        <p:spPr>
+          <a:xfrm>
+            <a:off x="0" y="0"/>
+            <a:ext cx="12191695" cy="320040"/>
+          </a:xfrm>
+          <a:prstGeom prst="rect">
+            <a:avLst/>
+          </a:prstGeom>
+          <a:solidFill>
+            <a:srgbClr val="0B2545"/>
+          </a:solidFill>
+          <a:ln>
+            <a:noFill/>
+          </a:ln>
+        </p:spPr>
+        <p:style>
+          <a:lnRef idx="1">
+            <a:schemeClr val="accent1"/>
+          </a:lnRef>
+          <a:fillRef idx="3">
+            <a:schemeClr val="accent1"/>
+          </a:fillRef>
+          <a:effectRef idx="2">
+            <a:schemeClr val="accent1"/>
+          </a:effectRef>
+          <a:fontRef idx="minor">
+            <a:schemeClr val="lt1"/>
+          </a:fontRef>
+        </p:style>
+        <p:txBody>
+          <a:bodyPr rtlCol="0" anchor="ctr"/>
+          <a:lstStyle/>
+          <a:p>
+            <a:pPr algn="ctr"/>
+            <a:endParaRPr/>
+          </a:p>
+        </p:txBody>
+      </p:sp>
+      <p:sp>
+        <p:nvSpPr>
+          <p:cNvPr id="4" name="TextBox 3"/>
+          <p:cNvSpPr txBox="1"/>
+          <p:nvPr/>
+        </p:nvSpPr>
+        <p:spPr>
+          <a:xfrm>
+            <a:off x="640080" y="457200"/>
+            <a:ext cx="11094415" cy="1005840"/>
+          </a:xfrm>
+          <a:prstGeom prst="rect">
+            <a:avLst/>
+          </a:prstGeom>
+          <a:noFill/>
+        </p:spPr>
+        <p:txBody>
+          <a:bodyPr wrap="none">
+            <a:spAutoFit/>
+          </a:bodyPr>
+          <a:lstStyle/>
+          <a:p>
+            <a:pPr>
+              <a:defRPr sz="4000" b="1">
+                <a:solidFill>
+                  <a:srgbClr val="0B2545"/>
+                </a:solidFill>
+                <a:latin typeface="Calibri"/>
+              </a:defRPr>
+            </a:pPr>
+            <a:r>
+              <a:t>Export &amp; Share + Assignment</a:t>
+            </a:r>
+          </a:p>
+        </p:txBody>
+      </p:sp>
+      <p:sp>
+        <p:nvSpPr>
+          <p:cNvPr id="5" name="TextBox 4"/>
+          <p:cNvSpPr txBox="1"/>
+          <p:nvPr/>
+        </p:nvSpPr>
+        <p:spPr>
+          <a:xfrm>
+            <a:off x="822960" y="1645920"/>
+            <a:ext cx="10820095" cy="4297680"/>
+          </a:xfrm>
+          <a:prstGeom prst="rect">
+            <a:avLst/>
+          </a:prstGeom>
+          <a:noFill/>
+        </p:spPr>
+        <p:txBody>
+          <a:bodyPr wrap="none">
+            <a:spAutoFit/>
+          </a:bodyPr>
+          <a:lstStyle/>
+          <a:p>
+            <a:pPr>
+              <a:defRPr sz="2200">
+                <a:solidFill>
+                  <a:srgbClr val="111827"/>
+                </a:solidFill>
+                <a:latin typeface="Calibri"/>
+              </a:defRPr>
+            </a:pPr>
+            <a:r>
+              <a:t>Export concise env YAMLs; optionally full lockfiles</a:t>
+            </a:r>
+          </a:p>
+          <a:p>
+            <a:pPr>
+              <a:defRPr sz="2200">
+                <a:solidFill>
+                  <a:srgbClr val="111827"/>
+                </a:solidFill>
+                <a:latin typeface="Calibri"/>
+              </a:defRPr>
+            </a:pPr>
+            <a:r>
+              <a:t>Recreate envs from YAML for reproducibility</a:t>
+            </a:r>
+          </a:p>
+          <a:p>
+            <a:pPr>
+              <a:defRPr sz="2200">
+                <a:solidFill>
+                  <a:srgbClr val="111827"/>
+                </a:solidFill>
+                <a:latin typeface="Calibri"/>
+              </a:defRPr>
+            </a:pPr>
+            <a:r>
+              <a:t>Assignment: 3 envs (QC, assembly, annotation) + README + logs</a:t>
+            </a:r>
+          </a:p>
+        </p:txBody>
+      </p:sp>
+      <p:sp>
+        <p:nvSpPr>
+          <p:cNvPr id="6" name="Rectangle 5"/>
+          <p:cNvSpPr/>
+          <p:nvPr/>
+        </p:nvSpPr>
+        <p:spPr>
+          <a:xfrm>
+            <a:off x="822960" y="3108960"/>
+            <a:ext cx="10820095" cy="3108960"/>
+          </a:xfrm>
+          <a:prstGeom prst="rect">
+            <a:avLst/>
+          </a:prstGeom>
+          <a:solidFill>
+            <a:srgbClr val="0F172A"/>
+          </a:solidFill>
+          <a:ln>
+            <a:noFill/>
+          </a:ln>
+        </p:spPr>
+        <p:style>
+          <a:lnRef idx="1">
+            <a:schemeClr val="accent1"/>
+          </a:lnRef>
+          <a:fillRef idx="3">
+            <a:schemeClr val="accent1"/>
+          </a:fillRef>
+          <a:effectRef idx="2">
+            <a:schemeClr val="accent1"/>
+          </a:effectRef>
+          <a:fontRef idx="minor">
+            <a:schemeClr val="lt1"/>
+          </a:fontRef>
+        </p:style>
+        <p:txBody>
+          <a:bodyPr rtlCol="0" anchor="ctr"/>
+          <a:lstStyle/>
+          <a:p>
+            <a:pPr algn="ctr"/>
+            <a:endParaRPr/>
+          </a:p>
+        </p:txBody>
+      </p:sp>
+      <p:sp>
+        <p:nvSpPr>
+          <p:cNvPr id="7" name="TextBox 6"/>
+          <p:cNvSpPr txBox="1"/>
+          <p:nvPr/>
+        </p:nvSpPr>
+        <p:spPr>
+          <a:xfrm>
+            <a:off x="1005840" y="3291840"/>
             <a:ext cx="10454335" cy="2743200"/>
           </a:xfrm>
           <a:prstGeom prst="rect">
@@ -12697,93 +13085,274 @@
               </a:defRPr>
             </a:pPr>
             <a:r>
+              <a:rPr dirty="0"/>
               <a:t># Concise exports (from history)</a:t>
             </a:r>
-            <a:br/>
-            <a:r>
-              <a:t>mkdir -p envs</a:t>
-            </a:r>
-            <a:br/>
-            <a:r>
-              <a:t>conda env export --name qc --from-history &gt; envs/qc.yml</a:t>
-            </a:r>
-            <a:br/>
-            <a:r>
-              <a:t>conda env export --name assembly --from-history &gt; envs/assembly.yml</a:t>
-            </a:r>
-            <a:br/>
-            <a:r>
-              <a:t>conda env export --name annotation --from-history &gt; envs/annotation.yml</a:t>
+            <a:br>
+              <a:rPr dirty="0"/>
+            </a:br>
+            <a:r>
+              <a:rPr dirty="0" err="1"/>
+              <a:t>mkdir</a:t>
+            </a:r>
+            <a:r>
+              <a:rPr dirty="0"/>
+              <a:t> -p </a:t>
+            </a:r>
+            <a:r>
+              <a:rPr dirty="0" err="1"/>
+              <a:t>envs</a:t>
+            </a:r>
+            <a:br>
+              <a:rPr dirty="0"/>
+            </a:br>
+            <a:r>
+              <a:rPr dirty="0" err="1"/>
+              <a:t>conda</a:t>
+            </a:r>
+            <a:r>
+              <a:rPr dirty="0"/>
+              <a:t> env export --name qc --from-history &gt; </a:t>
+            </a:r>
+            <a:r>
+              <a:rPr dirty="0" err="1"/>
+              <a:t>envs</a:t>
+            </a:r>
+            <a:r>
+              <a:rPr dirty="0"/>
+              <a:t>/</a:t>
+            </a:r>
+            <a:r>
+              <a:rPr dirty="0" err="1"/>
+              <a:t>qc.yml</a:t>
+            </a:r>
+            <a:br>
+              <a:rPr dirty="0"/>
+            </a:br>
+            <a:r>
+              <a:rPr dirty="0" err="1"/>
+              <a:t>conda</a:t>
+            </a:r>
+            <a:r>
+              <a:rPr dirty="0"/>
+              <a:t> env export --name assembly --from-history &gt; </a:t>
+            </a:r>
+            <a:r>
+              <a:rPr dirty="0" err="1"/>
+              <a:t>envs</a:t>
+            </a:r>
+            <a:r>
+              <a:rPr dirty="0"/>
+              <a:t>/</a:t>
+            </a:r>
+            <a:r>
+              <a:rPr dirty="0" err="1"/>
+              <a:t>assembly.yml</a:t>
+            </a:r>
+            <a:br>
+              <a:rPr dirty="0"/>
+            </a:br>
+            <a:r>
+              <a:rPr dirty="0" err="1"/>
+              <a:t>conda</a:t>
+            </a:r>
+            <a:r>
+              <a:rPr dirty="0"/>
+              <a:t> env export --name annotation --from-history &gt; </a:t>
+            </a:r>
+            <a:r>
+              <a:rPr dirty="0" err="1"/>
+              <a:t>envs</a:t>
+            </a:r>
+            <a:r>
+              <a:rPr dirty="0"/>
+              <a:t>/</a:t>
+            </a:r>
+            <a:r>
+              <a:rPr dirty="0" err="1"/>
+              <a:t>annotation.yml</a:t>
+            </a:r>
+            <a:br>
+              <a:rPr dirty="0"/>
+            </a:br>
+            <a:br>
+              <a:rPr dirty="0"/>
+            </a:br>
+            <a:r>
+              <a:rPr dirty="0"/>
+              <a:t># Full export (includes transitive deps)</a:t>
+            </a:r>
+            <a:br>
+              <a:rPr dirty="0"/>
+            </a:br>
+            <a:r>
+              <a:rPr dirty="0" err="1"/>
+              <a:t>conda</a:t>
+            </a:r>
+            <a:r>
+              <a:rPr dirty="0"/>
+              <a:t> env export --name qc &gt; </a:t>
+            </a:r>
+            <a:r>
+              <a:rPr dirty="0" err="1"/>
+              <a:t>envs</a:t>
+            </a:r>
+            <a:r>
+              <a:rPr dirty="0"/>
+              <a:t>/</a:t>
+            </a:r>
+            <a:r>
+              <a:rPr dirty="0" err="1"/>
+              <a:t>qc_full.yml</a:t>
             </a:r>
             <a:br/>
             <a:br/>
             <a:r>
-              <a:t># Full export (includes transitive deps)</a:t>
+              <a:t># Recreate</a:t>
             </a:r>
             <a:br/>
             <a:r>
-              <a:t>conda env export --name qc &gt; envs/qc_full.yml</a:t>
-            </a:r>
-            <a:br/>
-            <a:br/>
-            <a:r>
-              <a:t># Recreate</a:t>
-            </a:r>
-            <a:br/>
-            <a:r>
-              <a:t>mamba env create -f envs/qc.yml</a:t>
-            </a:r>
-            <a:br/>
-            <a:br/>
-            <a:r>
+              <a:t>mamba env create -f </a:t>
+            </a:r>
+            <a:r>
+              <a:rPr dirty="0" err="1"/>
+              <a:t>envs</a:t>
+            </a:r>
+            <a:r>
+              <a:rPr dirty="0"/>
+              <a:t>/</a:t>
+            </a:r>
+            <a:r>
+              <a:rPr dirty="0" err="1"/>
+              <a:t>qc.yml</a:t>
+            </a:r>
+            <a:br>
+              <a:rPr dirty="0"/>
+            </a:br>
+            <a:br>
+              <a:rPr dirty="0"/>
+            </a:br>
+            <a:r>
+              <a:rPr dirty="0"/>
               <a:t># Suggested repo layout</a:t>
             </a:r>
-            <a:br/>
-            <a:r>
+            <a:br>
+              <a:rPr dirty="0"/>
+            </a:br>
+            <a:r>
+              <a:rPr dirty="0"/>
               <a:t># week02_envs/</a:t>
             </a:r>
-            <a:br/>
-            <a:r>
-              <a:t>#   envs/</a:t>
-            </a:r>
-            <a:br/>
-            <a:r>
-              <a:t>#     qc.yml</a:t>
-            </a:r>
-            <a:br/>
-            <a:r>
-              <a:t>#     assembly.yml</a:t>
-            </a:r>
-            <a:br/>
-            <a:r>
-              <a:t>#     annotation.yml</a:t>
-            </a:r>
-            <a:br/>
-            <a:r>
+            <a:br>
+              <a:rPr dirty="0"/>
+            </a:br>
+            <a:r>
+              <a:rPr dirty="0"/>
+              <a:t>#   </a:t>
+            </a:r>
+            <a:r>
+              <a:rPr dirty="0" err="1"/>
+              <a:t>envs</a:t>
+            </a:r>
+            <a:r>
+              <a:rPr dirty="0"/>
+              <a:t>/</a:t>
+            </a:r>
+            <a:br>
+              <a:rPr dirty="0"/>
+            </a:br>
+            <a:r>
+              <a:rPr dirty="0"/>
+              <a:t>#     </a:t>
+            </a:r>
+            <a:r>
+              <a:rPr dirty="0" err="1"/>
+              <a:t>qc.yml</a:t>
+            </a:r>
+            <a:br>
+              <a:rPr dirty="0"/>
+            </a:br>
+            <a:r>
+              <a:rPr dirty="0"/>
+              <a:t>#     </a:t>
+            </a:r>
+            <a:r>
+              <a:rPr dirty="0" err="1"/>
+              <a:t>assembly.yml</a:t>
+            </a:r>
+            <a:br>
+              <a:rPr dirty="0"/>
+            </a:br>
+            <a:r>
+              <a:rPr dirty="0"/>
+              <a:t>#     </a:t>
+            </a:r>
+            <a:r>
+              <a:rPr dirty="0" err="1"/>
+              <a:t>annotation.yml</a:t>
+            </a:r>
+            <a:br>
+              <a:rPr dirty="0"/>
+            </a:br>
+            <a:r>
+              <a:rPr dirty="0"/>
               <a:t>#   docker/</a:t>
             </a:r>
-            <a:br/>
-            <a:r>
-              <a:t>#     Dockerfile</a:t>
-            </a:r>
-            <a:br/>
-            <a:r>
+            <a:br>
+              <a:rPr dirty="0"/>
+            </a:br>
+            <a:r>
+              <a:rPr dirty="0"/>
+              <a:t>#     </a:t>
+            </a:r>
+            <a:r>
+              <a:rPr dirty="0" err="1"/>
+              <a:t>Dockerfile</a:t>
+            </a:r>
+            <a:br>
+              <a:rPr dirty="0"/>
+            </a:br>
+            <a:r>
+              <a:rPr dirty="0"/>
               <a:t>#   scripts/</a:t>
             </a:r>
-            <a:br/>
-            <a:r>
-              <a:t>#     test_commands.sh</a:t>
-            </a:r>
-            <a:br/>
-            <a:r>
-              <a:t>#   README.md</a:t>
-            </a:r>
-            <a:br/>
-            <a:r>
-              <a:t>#   .gitignore</a:t>
-            </a:r>
-            <a:br/>
-            <a:endParaRPr/>
+            <a:br>
+              <a:rPr dirty="0"/>
+            </a:br>
+            <a:r>
+              <a:rPr dirty="0"/>
+              <a:t>#     </a:t>
+            </a:r>
+            <a:r>
+              <a:rPr dirty="0" err="1"/>
+              <a:t>test_commands.sh</a:t>
+            </a:r>
+            <a:br>
+              <a:rPr dirty="0"/>
+            </a:br>
+            <a:r>
+              <a:rPr dirty="0"/>
+              <a:t>#   </a:t>
+            </a:r>
+            <a:r>
+              <a:rPr dirty="0" err="1"/>
+              <a:t>README.md</a:t>
+            </a:r>
+            <a:br>
+              <a:rPr dirty="0"/>
+            </a:br>
+            <a:r>
+              <a:rPr dirty="0"/>
+              <a:t>#   .</a:t>
+            </a:r>
+            <a:r>
+              <a:rPr dirty="0" err="1"/>
+              <a:t>gitignore</a:t>
+            </a:r>
+            <a:br>
+              <a:rPr dirty="0"/>
+            </a:br>
+            <a:endParaRPr dirty="0"/>
           </a:p>
         </p:txBody>
       </p:sp>
@@ -14413,7 +14982,7 @@
         <p:spPr>
           <a:xfrm>
             <a:off x="1005840" y="3291840"/>
-            <a:ext cx="10454335" cy="2743200"/>
+            <a:ext cx="10454335" cy="2062103"/>
           </a:xfrm>
           <a:prstGeom prst="rect">
             <a:avLst/>
@@ -14435,80 +15004,111 @@
               </a:defRPr>
             </a:pPr>
             <a:r>
-              <a:t># QC environment: FastQC + MultiQC</a:t>
-            </a:r>
-            <a:br/>
-            <a:r>
-              <a:t>mamba create -n qc fastqc=0.12.* multiqc=1.* -c bioconda -c conda-forge -y</a:t>
-            </a:r>
-            <a:br/>
-            <a:r>
-              <a:t>conda activate qc</a:t>
-            </a:r>
-            <a:br/>
-            <a:r>
-              <a:t>fastqc --version</a:t>
-            </a:r>
-            <a:br/>
-            <a:r>
-              <a:t>multiqc --version</a:t>
-            </a:r>
-            <a:br/>
-            <a:r>
-              <a:t>conda deactivate</a:t>
-            </a:r>
-            <a:br/>
-            <a:br/>
-            <a:r>
-              <a:t># Assembly: SPAdes + BWA + SAMtools</a:t>
-            </a:r>
-            <a:br/>
-            <a:r>
-              <a:t>mamba create -n assembly spades=3.15.* bwa=0.7.* samtools=1.* -c bioconda -c conda-forge -y</a:t>
-            </a:r>
-            <a:br/>
-            <a:r>
-              <a:t>conda activate assembly</a:t>
-            </a:r>
-            <a:br/>
-            <a:r>
-              <a:t>spades.py --version</a:t>
-            </a:r>
-            <a:br/>
-            <a:r>
-              <a:t>bwa 2&gt;&amp;1 | head -n 1</a:t>
-            </a:r>
-            <a:br/>
-            <a:r>
-              <a:t>samtools --version | head -n 1</a:t>
-            </a:r>
-            <a:br/>
-            <a:r>
-              <a:t>conda deactivate</a:t>
-            </a:r>
-            <a:br/>
-            <a:br/>
-            <a:r>
-              <a:t># Annotation: Prokka</a:t>
-            </a:r>
-            <a:br/>
-            <a:r>
-              <a:t>mamba create -n annotation prokka=1.14.* -c bioconda -c conda-forge -y</a:t>
-            </a:r>
-            <a:br/>
-            <a:r>
-              <a:t>conda activate annotation</a:t>
-            </a:r>
-            <a:br/>
-            <a:r>
-              <a:t>prokka --version</a:t>
-            </a:r>
-            <a:br/>
-            <a:r>
-              <a:t>conda deactivate</a:t>
-            </a:r>
-            <a:br/>
-            <a:endParaRPr/>
+              <a:rPr dirty="0"/>
+              <a:t># QC environment: </a:t>
+            </a:r>
+            <a:r>
+              <a:rPr dirty="0" err="1"/>
+              <a:t>FastQC</a:t>
+            </a:r>
+            <a:r>
+              <a:rPr dirty="0"/>
+              <a:t> + </a:t>
+            </a:r>
+            <a:r>
+              <a:rPr dirty="0" err="1"/>
+              <a:t>MultiQC</a:t>
+            </a:r>
+            <a:br>
+              <a:rPr dirty="0"/>
+            </a:br>
+            <a:r>
+              <a:rPr dirty="0"/>
+              <a:t>mamba create -n qc </a:t>
+            </a:r>
+            <a:r>
+              <a:rPr dirty="0" err="1"/>
+              <a:t>fastqc</a:t>
+            </a:r>
+            <a:r>
+              <a:rPr dirty="0"/>
+              <a:t>=0.12.* </a:t>
+            </a:r>
+            <a:r>
+              <a:rPr dirty="0" err="1"/>
+              <a:t>multiqc</a:t>
+            </a:r>
+            <a:r>
+              <a:rPr dirty="0"/>
+              <a:t>=1.* -c </a:t>
+            </a:r>
+            <a:r>
+              <a:rPr dirty="0" err="1"/>
+              <a:t>bioconda</a:t>
+            </a:r>
+            <a:r>
+              <a:rPr dirty="0"/>
+              <a:t> -c </a:t>
+            </a:r>
+            <a:r>
+              <a:rPr dirty="0" err="1"/>
+              <a:t>conda</a:t>
+            </a:r>
+            <a:r>
+              <a:rPr dirty="0"/>
+              <a:t>-forge -y</a:t>
+            </a:r>
+            <a:br>
+              <a:rPr dirty="0"/>
+            </a:br>
+            <a:r>
+              <a:rPr dirty="0" err="1"/>
+              <a:t>conda</a:t>
+            </a:r>
+            <a:r>
+              <a:rPr dirty="0"/>
+              <a:t> activate qc</a:t>
+            </a:r>
+            <a:br>
+              <a:rPr dirty="0"/>
+            </a:br>
+            <a:r>
+              <a:rPr dirty="0" err="1"/>
+              <a:t>fastqc</a:t>
+            </a:r>
+            <a:r>
+              <a:rPr dirty="0"/>
+              <a:t> --version</a:t>
+            </a:r>
+            <a:br>
+              <a:rPr dirty="0"/>
+            </a:br>
+            <a:r>
+              <a:rPr dirty="0" err="1"/>
+              <a:t>multiqc</a:t>
+            </a:r>
+            <a:r>
+              <a:rPr dirty="0"/>
+              <a:t> --version</a:t>
+            </a:r>
+            <a:br>
+              <a:rPr dirty="0"/>
+            </a:br>
+            <a:r>
+              <a:rPr dirty="0" err="1"/>
+              <a:t>conda</a:t>
+            </a:r>
+            <a:r>
+              <a:rPr dirty="0"/>
+              <a:t> deactivate</a:t>
+            </a:r>
+            <a:br>
+              <a:rPr dirty="0"/>
+            </a:br>
+            <a:br>
+              <a:rPr dirty="0"/>
+            </a:br>
+            <a:endParaRPr dirty="0"/>
           </a:p>
         </p:txBody>
       </p:sp>
@@ -14523,6 +15123,14 @@
 <file path=ppt/slides/slide9.xml><?xml version="1.0" encoding="utf-8"?>
 <p:sld xmlns:a="http://schemas.openxmlformats.org/drawingml/2006/main" xmlns:r="http://schemas.openxmlformats.org/officeDocument/2006/relationships" xmlns:p="http://schemas.openxmlformats.org/presentationml/2006/main">
   <p:cSld>
+    <p:bg>
+      <p:bgPr>
+        <a:solidFill>
+          <a:schemeClr val="bg1"/>
+        </a:solidFill>
+        <a:effectLst/>
+      </p:bgPr>
+    </p:bg>
     <p:spTree>
       <p:nvGrpSpPr>
         <p:cNvPr id="1" name=""/>
@@ -14537,35 +15145,51 @@
           <a:chExt cx="0" cy="0"/>
         </a:xfrm>
       </p:grpSpPr>
-      <p:sp>
+      <p:sp useBgFill="1">
         <p:nvSpPr>
-          <p:cNvPr id="2" name="Rectangle 1"/>
-          <p:cNvSpPr/>
-          <p:nvPr/>
+          <p:cNvPr id="14" name="Rectangle 13">
+            <a:extLst>
+              <a:ext uri="{FF2B5EF4-FFF2-40B4-BE49-F238E27FC236}">
+                <a16:creationId xmlns:a16="http://schemas.microsoft.com/office/drawing/2014/main" id="{4DA718D0-4865-4629-8134-44F68D41D574}"/>
+              </a:ext>
+              <a:ext uri="{C183D7F6-B498-43B3-948B-1728B52AA6E4}">
+                <adec:decorative xmlns:adec="http://schemas.microsoft.com/office/drawing/2017/decorative" val="1"/>
+              </a:ext>
+            </a:extLst>
+          </p:cNvPr>
+          <p:cNvSpPr>
+            <a:spLocks noGrp="1" noRot="1" noChangeAspect="1" noMove="1" noResize="1" noEditPoints="1" noAdjustHandles="1" noChangeArrowheads="1" noChangeShapeType="1" noTextEdit="1"/>
+          </p:cNvSpPr>
+          <p:nvPr>
+            <p:extLst>
+              <p:ext uri="{386F3935-93C4-4BCD-93E2-E3B085C9AB24}">
+                <p16:designElem xmlns:p16="http://schemas.microsoft.com/office/powerpoint/2015/main" val="1"/>
+              </p:ext>
+            </p:extLst>
+          </p:nvPr>
         </p:nvSpPr>
         <p:spPr>
           <a:xfrm>
             <a:off x="0" y="0"/>
-            <a:ext cx="411480" cy="6858000"/>
+            <a:ext cx="12191999" cy="6857365"/>
           </a:xfrm>
           <a:prstGeom prst="rect">
             <a:avLst/>
           </a:prstGeom>
-          <a:solidFill>
-            <a:srgbClr val="2A9D8F"/>
-          </a:solidFill>
           <a:ln>
             <a:noFill/>
           </a:ln>
         </p:spPr>
         <p:style>
-          <a:lnRef idx="1">
-            <a:schemeClr val="accent1"/>
+          <a:lnRef idx="2">
+            <a:schemeClr val="accent1">
+              <a:shade val="50000"/>
+            </a:schemeClr>
           </a:lnRef>
-          <a:fillRef idx="3">
+          <a:fillRef idx="1">
             <a:schemeClr val="accent1"/>
           </a:fillRef>
-          <a:effectRef idx="2">
+          <a:effectRef idx="0">
             <a:schemeClr val="accent1"/>
           </a:effectRef>
           <a:fontRef idx="minor">
@@ -14577,39 +15201,218 @@
           <a:lstStyle/>
           <a:p>
             <a:pPr algn="ctr"/>
-            <a:endParaRPr/>
+            <a:endParaRPr lang="en-US"/>
           </a:p>
         </p:txBody>
       </p:sp>
+      <p:grpSp>
+        <p:nvGrpSpPr>
+          <p:cNvPr id="16" name="Group 15">
+            <a:extLst>
+              <a:ext uri="{FF2B5EF4-FFF2-40B4-BE49-F238E27FC236}">
+                <a16:creationId xmlns:a16="http://schemas.microsoft.com/office/drawing/2014/main" id="{65167ED7-6315-43AB-B1B6-C326D5FD8F84}"/>
+              </a:ext>
+              <a:ext uri="{C183D7F6-B498-43B3-948B-1728B52AA6E4}">
+                <adec:decorative xmlns:adec="http://schemas.microsoft.com/office/drawing/2017/decorative" val="1"/>
+              </a:ext>
+            </a:extLst>
+          </p:cNvPr>
+          <p:cNvGrpSpPr>
+            <a:grpSpLocks noGrp="1" noUngrp="1" noRot="1" noChangeAspect="1" noMove="1" noResize="1"/>
+          </p:cNvGrpSpPr>
+          <p:nvPr>
+            <p:extLst>
+              <p:ext uri="{386F3935-93C4-4BCD-93E2-E3B085C9AB24}">
+                <p16:designElem xmlns:p16="http://schemas.microsoft.com/office/powerpoint/2015/main" val="1"/>
+              </p:ext>
+            </p:extLst>
+          </p:nvPr>
+        </p:nvGrpSpPr>
+        <p:grpSpPr>
+          <a:xfrm rot="5400000">
+            <a:off x="-2340441" y="2666183"/>
+            <a:ext cx="5860051" cy="527712"/>
+            <a:chOff x="6081624" y="1998368"/>
+            <a:chExt cx="5613457" cy="782175"/>
+          </a:xfrm>
+          <a:solidFill>
+            <a:schemeClr val="accent4"/>
+          </a:solidFill>
+        </p:grpSpPr>
+        <p:sp>
+          <p:nvSpPr>
+            <p:cNvPr id="17" name="Rectangle 16">
+              <a:extLst>
+                <a:ext uri="{FF2B5EF4-FFF2-40B4-BE49-F238E27FC236}">
+                  <a16:creationId xmlns:a16="http://schemas.microsoft.com/office/drawing/2014/main" id="{EF4D8839-FB03-487D-ACC8-8BFEDD4FEBAE}"/>
+                </a:ext>
+                <a:ext uri="{C183D7F6-B498-43B3-948B-1728B52AA6E4}">
+                  <adec:decorative xmlns:adec="http://schemas.microsoft.com/office/drawing/2017/decorative" val="1"/>
+                </a:ext>
+              </a:extLst>
+            </p:cNvPr>
+            <p:cNvSpPr/>
+            <p:nvPr>
+              <p:extLst>
+                <p:ext uri="{386F3935-93C4-4BCD-93E2-E3B085C9AB24}">
+                  <p16:designElem xmlns:p16="http://schemas.microsoft.com/office/powerpoint/2015/main" val="1"/>
+                </p:ext>
+              </p:extLst>
+            </p:nvPr>
+          </p:nvSpPr>
+          <p:spPr>
+            <a:xfrm rot="5400000">
+              <a:off x="11228040" y="2313027"/>
+              <a:ext cx="781700" cy="152382"/>
+            </a:xfrm>
+            <a:prstGeom prst="rect">
+              <a:avLst/>
+            </a:prstGeom>
+            <a:grpFill/>
+            <a:ln>
+              <a:noFill/>
+            </a:ln>
+          </p:spPr>
+          <p:style>
+            <a:lnRef idx="2">
+              <a:schemeClr val="accent1">
+                <a:shade val="50000"/>
+              </a:schemeClr>
+            </a:lnRef>
+            <a:fillRef idx="1">
+              <a:schemeClr val="accent1"/>
+            </a:fillRef>
+            <a:effectRef idx="0">
+              <a:schemeClr val="accent1"/>
+            </a:effectRef>
+            <a:fontRef idx="minor">
+              <a:schemeClr val="lt1"/>
+            </a:fontRef>
+          </p:style>
+          <p:txBody>
+            <a:bodyPr rtlCol="0" anchor="ctr"/>
+            <a:lstStyle/>
+            <a:p>
+              <a:pPr algn="ctr"/>
+              <a:endParaRPr lang="en-US"/>
+            </a:p>
+          </p:txBody>
+        </p:sp>
+        <p:sp>
+          <p:nvSpPr>
+            <p:cNvPr id="18" name="Rectangle 17">
+              <a:extLst>
+                <a:ext uri="{FF2B5EF4-FFF2-40B4-BE49-F238E27FC236}">
+                  <a16:creationId xmlns:a16="http://schemas.microsoft.com/office/drawing/2014/main" id="{0EF75023-9A3B-42FC-B704-61A8F7BEF415}"/>
+                </a:ext>
+                <a:ext uri="{C183D7F6-B498-43B3-948B-1728B52AA6E4}">
+                  <adec:decorative xmlns:adec="http://schemas.microsoft.com/office/drawing/2017/decorative" val="1"/>
+                </a:ext>
+              </a:extLst>
+            </p:cNvPr>
+            <p:cNvSpPr/>
+            <p:nvPr>
+              <p:extLst>
+                <p:ext uri="{386F3935-93C4-4BCD-93E2-E3B085C9AB24}">
+                  <p16:designElem xmlns:p16="http://schemas.microsoft.com/office/powerpoint/2015/main" val="1"/>
+                </p:ext>
+              </p:extLst>
+            </p:nvPr>
+          </p:nvSpPr>
+          <p:spPr>
+            <a:xfrm flipH="1" flipV="1">
+              <a:off x="6081624" y="1998844"/>
+              <a:ext cx="5372968" cy="781699"/>
+            </a:xfrm>
+            <a:prstGeom prst="rect">
+              <a:avLst/>
+            </a:prstGeom>
+            <a:grpFill/>
+            <a:ln>
+              <a:noFill/>
+            </a:ln>
+          </p:spPr>
+          <p:style>
+            <a:lnRef idx="2">
+              <a:schemeClr val="accent1">
+                <a:shade val="50000"/>
+              </a:schemeClr>
+            </a:lnRef>
+            <a:fillRef idx="1">
+              <a:schemeClr val="accent1"/>
+            </a:fillRef>
+            <a:effectRef idx="0">
+              <a:schemeClr val="accent1"/>
+            </a:effectRef>
+            <a:fontRef idx="minor">
+              <a:schemeClr val="lt1"/>
+            </a:fontRef>
+          </p:style>
+          <p:txBody>
+            <a:bodyPr rtlCol="0" anchor="ctr"/>
+            <a:lstStyle/>
+            <a:p>
+              <a:pPr algn="ctr"/>
+              <a:endParaRPr lang="en-US"/>
+            </a:p>
+          </p:txBody>
+        </p:sp>
+      </p:grpSp>
       <p:sp>
         <p:nvSpPr>
-          <p:cNvPr id="3" name="Rectangle 2"/>
-          <p:cNvSpPr/>
-          <p:nvPr/>
+          <p:cNvPr id="20" name="Rectangle 19">
+            <a:extLst>
+              <a:ext uri="{FF2B5EF4-FFF2-40B4-BE49-F238E27FC236}">
+                <a16:creationId xmlns:a16="http://schemas.microsoft.com/office/drawing/2014/main" id="{CBC4F608-B4B8-48C3-9572-C0F061B1CD99}"/>
+              </a:ext>
+              <a:ext uri="{C183D7F6-B498-43B3-948B-1728B52AA6E4}">
+                <adec:decorative xmlns:adec="http://schemas.microsoft.com/office/drawing/2017/decorative" val="1"/>
+              </a:ext>
+            </a:extLst>
+          </p:cNvPr>
+          <p:cNvSpPr>
+            <a:spLocks noGrp="1" noRot="1" noChangeAspect="1" noMove="1" noResize="1" noEditPoints="1" noAdjustHandles="1" noChangeArrowheads="1" noChangeShapeType="1" noTextEdit="1"/>
+          </p:cNvSpPr>
+          <p:nvPr>
+            <p:extLst>
+              <p:ext uri="{386F3935-93C4-4BCD-93E2-E3B085C9AB24}">
+                <p16:designElem xmlns:p16="http://schemas.microsoft.com/office/powerpoint/2015/main" val="1"/>
+              </p:ext>
+            </p:extLst>
+          </p:nvPr>
         </p:nvSpPr>
         <p:spPr>
           <a:xfrm>
-            <a:off x="0" y="0"/>
-            <a:ext cx="12191695" cy="320040"/>
+            <a:off x="579528" y="922919"/>
+            <a:ext cx="11111729" cy="5461252"/>
           </a:xfrm>
           <a:prstGeom prst="rect">
             <a:avLst/>
           </a:prstGeom>
           <a:solidFill>
-            <a:srgbClr val="0B2545"/>
+            <a:schemeClr val="bg1"/>
           </a:solidFill>
           <a:ln>
             <a:noFill/>
           </a:ln>
+          <a:effectLst>
+            <a:outerShdw blurRad="139700" dist="127000" dir="5400000" algn="t" rotWithShape="0">
+              <a:prstClr val="black">
+                <a:alpha val="15000"/>
+              </a:prstClr>
+            </a:outerShdw>
+          </a:effectLst>
         </p:spPr>
         <p:style>
-          <a:lnRef idx="1">
-            <a:schemeClr val="accent1"/>
+          <a:lnRef idx="2">
+            <a:schemeClr val="accent1">
+              <a:shade val="50000"/>
+            </a:schemeClr>
           </a:lnRef>
-          <a:fillRef idx="3">
+          <a:fillRef idx="1">
             <a:schemeClr val="accent1"/>
           </a:fillRef>
-          <a:effectRef idx="2">
+          <a:effectRef idx="0">
             <a:schemeClr val="accent1"/>
           </a:effectRef>
           <a:fontRef idx="minor">
@@ -14621,266 +15424,253 @@
           <a:lstStyle/>
           <a:p>
             <a:pPr algn="ctr"/>
-            <a:endParaRPr/>
+            <a:endParaRPr lang="en-US"/>
           </a:p>
         </p:txBody>
       </p:sp>
       <p:sp>
         <p:nvSpPr>
-          <p:cNvPr id="4" name="TextBox 3"/>
+          <p:cNvPr id="2" name="TextBox 1">
+            <a:extLst>
+              <a:ext uri="{FF2B5EF4-FFF2-40B4-BE49-F238E27FC236}">
+                <a16:creationId xmlns:a16="http://schemas.microsoft.com/office/drawing/2014/main" id="{A6B126F8-0A96-6FFE-3C54-62878EB40687}"/>
+              </a:ext>
+            </a:extLst>
+          </p:cNvPr>
           <p:cNvSpPr txBox="1"/>
           <p:nvPr/>
         </p:nvSpPr>
         <p:spPr>
           <a:xfrm>
-            <a:off x="640080" y="457200"/>
-            <a:ext cx="11094415" cy="1005840"/>
+            <a:off x="1289304" y="2902913"/>
+            <a:ext cx="9849751" cy="3032168"/>
           </a:xfrm>
           <a:prstGeom prst="rect">
             <a:avLst/>
           </a:prstGeom>
-          <a:noFill/>
         </p:spPr>
         <p:txBody>
-          <a:bodyPr wrap="none">
-            <a:spAutoFit/>
+          <a:bodyPr vert="horz" lIns="91440" tIns="45720" rIns="91440" bIns="45720" rtlCol="0" anchor="ctr">
+            <a:normAutofit/>
           </a:bodyPr>
           <a:lstStyle/>
           <a:p>
-            <a:pPr>
-              <a:defRPr sz="4000" b="1">
-                <a:solidFill>
-                  <a:srgbClr val="0B2545"/>
-                </a:solidFill>
-                <a:latin typeface="Calibri"/>
-              </a:defRPr>
+            <a:pPr defTabSz="914400">
+              <a:lnSpc>
+                <a:spcPct val="90000"/>
+              </a:lnSpc>
+              <a:spcAft>
+                <a:spcPts val="600"/>
+              </a:spcAft>
             </a:pPr>
-            <a:r>
-              <a:t>Docker Demo (Hands-on)</a:t>
-            </a:r>
-          </a:p>
-        </p:txBody>
-      </p:sp>
-      <p:sp>
-        <p:nvSpPr>
-          <p:cNvPr id="5" name="TextBox 4"/>
-          <p:cNvSpPr txBox="1"/>
-          <p:nvPr/>
-        </p:nvSpPr>
-        <p:spPr>
-          <a:xfrm>
-            <a:off x="822960" y="1645920"/>
-            <a:ext cx="10820095" cy="4297680"/>
-          </a:xfrm>
-          <a:prstGeom prst="rect">
-            <a:avLst/>
-          </a:prstGeom>
-          <a:noFill/>
-        </p:spPr>
-        <p:txBody>
-          <a:bodyPr wrap="none">
-            <a:spAutoFit/>
-          </a:bodyPr>
-          <a:lstStyle/>
-          <a:p>
-            <a:pPr>
-              <a:defRPr sz="2200">
-                <a:solidFill>
-                  <a:srgbClr val="111827"/>
-                </a:solidFill>
-                <a:latin typeface="Calibri"/>
-              </a:defRPr>
+            <a:br>
+              <a:rPr lang="en-US" sz="1300" dirty="0"/>
+            </a:br>
+            <a:br>
+              <a:rPr lang="en-US" sz="1300" dirty="0"/>
+            </a:br>
+            <a:r>
+              <a:rPr lang="en-US" sz="1300" dirty="0"/>
+              <a:t># Assembly: </a:t>
+            </a:r>
+            <a:r>
+              <a:rPr lang="en-US" sz="1300" dirty="0" err="1"/>
+              <a:t>SPAdes</a:t>
+            </a:r>
+            <a:r>
+              <a:rPr lang="en-US" sz="1300" dirty="0"/>
+              <a:t> + BWA + </a:t>
+            </a:r>
+            <a:r>
+              <a:rPr lang="en-US" sz="1300" dirty="0" err="1"/>
+              <a:t>SAMtools</a:t>
+            </a:r>
+            <a:br>
+              <a:rPr lang="en-US" sz="1300" dirty="0"/>
+            </a:br>
+            <a:r>
+              <a:rPr lang="en-US" sz="1300" dirty="0"/>
+              <a:t>mamba create -n assembly spades=3.15.* bwa=0.7.* </a:t>
+            </a:r>
+            <a:r>
+              <a:rPr lang="en-US" sz="1300" dirty="0" err="1"/>
+              <a:t>samtools</a:t>
+            </a:r>
+            <a:r>
+              <a:rPr lang="en-US" sz="1300" dirty="0"/>
+              <a:t>=1.* -c </a:t>
+            </a:r>
+            <a:r>
+              <a:rPr lang="en-US" sz="1300" dirty="0" err="1"/>
+              <a:t>bioconda</a:t>
+            </a:r>
+            <a:r>
+              <a:rPr lang="en-US" sz="1300" dirty="0"/>
+              <a:t> -c </a:t>
+            </a:r>
+            <a:r>
+              <a:rPr lang="en-US" sz="1300" dirty="0" err="1"/>
+              <a:t>conda</a:t>
+            </a:r>
+            <a:r>
+              <a:rPr lang="en-US" sz="1300" dirty="0"/>
+              <a:t>-forge -y</a:t>
+            </a:r>
+            <a:br>
+              <a:rPr lang="en-US" sz="1300" dirty="0"/>
+            </a:br>
+            <a:r>
+              <a:rPr lang="en-US" sz="1300" dirty="0" err="1"/>
+              <a:t>conda</a:t>
+            </a:r>
+            <a:r>
+              <a:rPr lang="en-US" sz="1300" dirty="0"/>
+              <a:t> activate assembly</a:t>
+            </a:r>
+            <a:br>
+              <a:rPr lang="en-US" sz="1300" dirty="0"/>
+            </a:br>
+            <a:r>
+              <a:rPr lang="en-US" sz="1300" dirty="0" err="1"/>
+              <a:t>spades.py</a:t>
+            </a:r>
+            <a:r>
+              <a:rPr lang="en-US" sz="1300" dirty="0"/>
+              <a:t> --version</a:t>
+            </a:r>
+            <a:br>
+              <a:rPr lang="en-US" sz="1300" dirty="0"/>
+            </a:br>
+            <a:r>
+              <a:rPr lang="en-US" sz="1300" dirty="0"/>
+              <a:t>bwa 2&gt;&amp;1 | head -n 1</a:t>
+            </a:r>
+            <a:br>
+              <a:rPr lang="en-US" sz="1300" dirty="0"/>
+            </a:br>
+            <a:r>
+              <a:rPr lang="en-US" sz="1300" dirty="0" err="1"/>
+              <a:t>samtools</a:t>
+            </a:r>
+            <a:r>
+              <a:rPr lang="en-US" sz="1300" dirty="0"/>
+              <a:t> --version | head -n 1</a:t>
+            </a:r>
+            <a:br>
+              <a:rPr lang="en-US" sz="1300" dirty="0"/>
+            </a:br>
+            <a:r>
+              <a:rPr lang="en-US" sz="1300" dirty="0" err="1"/>
+              <a:t>conda</a:t>
+            </a:r>
+            <a:r>
+              <a:rPr lang="en-US" sz="1300" dirty="0"/>
+              <a:t> deactivate</a:t>
+            </a:r>
+            <a:br>
+              <a:rPr lang="en-US" sz="1300" dirty="0"/>
+            </a:br>
+            <a:br>
+              <a:rPr lang="en-US" sz="1300" dirty="0"/>
+            </a:br>
+            <a:r>
+              <a:rPr lang="en-US" sz="1300" dirty="0"/>
+              <a:t># Annotation: </a:t>
+            </a:r>
+            <a:r>
+              <a:rPr lang="en-US" sz="1300" dirty="0" err="1"/>
+              <a:t>Prokka</a:t>
+            </a:r>
+            <a:br>
+              <a:rPr lang="en-US" sz="1300" dirty="0"/>
+            </a:br>
+            <a:r>
+              <a:rPr lang="en-US" sz="1300" dirty="0"/>
+              <a:t>mamba create -n annotation </a:t>
+            </a:r>
+            <a:r>
+              <a:rPr lang="en-US" sz="1300" dirty="0" err="1"/>
+              <a:t>prokka</a:t>
+            </a:r>
+            <a:r>
+              <a:rPr lang="en-US" sz="1300" dirty="0"/>
+              <a:t>=1.14.* -c </a:t>
+            </a:r>
+            <a:r>
+              <a:rPr lang="en-US" sz="1300" dirty="0" err="1"/>
+              <a:t>bioconda</a:t>
+            </a:r>
+            <a:r>
+              <a:rPr lang="en-US" sz="1300" dirty="0"/>
+              <a:t> -c </a:t>
+            </a:r>
+            <a:r>
+              <a:rPr lang="en-US" sz="1300" dirty="0" err="1"/>
+              <a:t>conda</a:t>
+            </a:r>
+            <a:r>
+              <a:rPr lang="en-US" sz="1300" dirty="0"/>
+              <a:t>-forge -y</a:t>
+            </a:r>
+            <a:br>
+              <a:rPr lang="en-US" sz="1300" dirty="0"/>
+            </a:br>
+            <a:r>
+              <a:rPr lang="en-US" sz="1300" dirty="0" err="1"/>
+              <a:t>conda</a:t>
+            </a:r>
+            <a:r>
+              <a:rPr lang="en-US" sz="1300" dirty="0"/>
+              <a:t> activate annotation</a:t>
+            </a:r>
+            <a:br>
+              <a:rPr lang="en-US" sz="1300" dirty="0"/>
+            </a:br>
+            <a:r>
+              <a:rPr lang="en-US" sz="1300" dirty="0" err="1"/>
+              <a:t>prokka</a:t>
+            </a:r>
+            <a:r>
+              <a:rPr lang="en-US" sz="1300" dirty="0"/>
+              <a:t> --version</a:t>
+            </a:r>
+            <a:br>
+              <a:rPr lang="en-US" sz="1300" dirty="0"/>
+            </a:br>
+            <a:r>
+              <a:rPr lang="en-US" sz="1300" dirty="0" err="1"/>
+              <a:t>conda</a:t>
+            </a:r>
+            <a:r>
+              <a:rPr lang="en-US" sz="1300" dirty="0"/>
+              <a:t> deactivate</a:t>
+            </a:r>
+            <a:br>
+              <a:rPr lang="en-US" sz="1300" dirty="0"/>
+            </a:br>
+            <a:endParaRPr lang="en-US" sz="1300" dirty="0"/>
+          </a:p>
+          <a:p>
+            <a:pPr indent="-228600" defTabSz="914400">
+              <a:lnSpc>
+                <a:spcPct val="90000"/>
+              </a:lnSpc>
+              <a:spcAft>
+                <a:spcPts val="600"/>
+              </a:spcAft>
+              <a:buFont typeface="Arial" panose="020B0604020202020204" pitchFamily="34" charset="0"/>
+              <a:buChar char="•"/>
             </a:pPr>
-            <a:r>
-              <a:t>Pull and run a base image</a:t>
-            </a:r>
-          </a:p>
-          <a:p>
-            <a:pPr>
-              <a:defRPr sz="2200">
-                <a:solidFill>
-                  <a:srgbClr val="111827"/>
-                </a:solidFill>
-                <a:latin typeface="Calibri"/>
-              </a:defRPr>
-            </a:pPr>
-            <a:r>
-              <a:t>Install tools in container, verify versions</a:t>
-            </a:r>
-          </a:p>
-          <a:p>
-            <a:pPr>
-              <a:defRPr sz="2200">
-                <a:solidFill>
-                  <a:srgbClr val="111827"/>
-                </a:solidFill>
-                <a:latin typeface="Calibri"/>
-              </a:defRPr>
-            </a:pPr>
-            <a:r>
-              <a:t>Build minimal image; mount volumes for data</a:t>
-            </a:r>
-          </a:p>
-        </p:txBody>
-      </p:sp>
-      <p:sp>
-        <p:nvSpPr>
-          <p:cNvPr id="6" name="Rectangle 5"/>
-          <p:cNvSpPr/>
-          <p:nvPr/>
-        </p:nvSpPr>
-        <p:spPr>
-          <a:xfrm>
-            <a:off x="822960" y="3108960"/>
-            <a:ext cx="10820095" cy="3108960"/>
-          </a:xfrm>
-          <a:prstGeom prst="rect">
-            <a:avLst/>
-          </a:prstGeom>
-          <a:solidFill>
-            <a:srgbClr val="0F172A"/>
-          </a:solidFill>
-          <a:ln>
-            <a:noFill/>
-          </a:ln>
-        </p:spPr>
-        <p:style>
-          <a:lnRef idx="1">
-            <a:schemeClr val="accent1"/>
-          </a:lnRef>
-          <a:fillRef idx="3">
-            <a:schemeClr val="accent1"/>
-          </a:fillRef>
-          <a:effectRef idx="2">
-            <a:schemeClr val="accent1"/>
-          </a:effectRef>
-          <a:fontRef idx="minor">
-            <a:schemeClr val="lt1"/>
-          </a:fontRef>
-        </p:style>
-        <p:txBody>
-          <a:bodyPr rtlCol="0" anchor="ctr"/>
-          <a:lstStyle/>
-          <a:p>
-            <a:pPr algn="ctr"/>
-            <a:endParaRPr/>
-          </a:p>
-        </p:txBody>
-      </p:sp>
-      <p:sp>
-        <p:nvSpPr>
-          <p:cNvPr id="7" name="TextBox 6"/>
-          <p:cNvSpPr txBox="1"/>
-          <p:nvPr/>
-        </p:nvSpPr>
-        <p:spPr>
-          <a:xfrm>
-            <a:off x="1005840" y="3291840"/>
-            <a:ext cx="10454335" cy="2743200"/>
-          </a:xfrm>
-          <a:prstGeom prst="rect">
-            <a:avLst/>
-          </a:prstGeom>
-          <a:noFill/>
-        </p:spPr>
-        <p:txBody>
-          <a:bodyPr wrap="square">
-            <a:spAutoFit/>
-          </a:bodyPr>
-          <a:lstStyle/>
-          <a:p>
-            <a:pPr>
-              <a:defRPr sz="1600">
-                <a:solidFill>
-                  <a:srgbClr val="ECF1F7"/>
-                </a:solidFill>
-                <a:latin typeface="Consolas"/>
-              </a:defRPr>
-            </a:pPr>
-            <a:r>
-              <a:t># Check Docker and pull Ubuntu</a:t>
-            </a:r>
-            <a:br/>
-            <a:r>
-              <a:t>docker --version</a:t>
-            </a:r>
-            <a:br/>
-            <a:r>
-              <a:t>docker pull ubuntu:22.04</a:t>
-            </a:r>
-            <a:br/>
-            <a:r>
-              <a:t>docker run --rm -it ubuntu:22.04 bash</a:t>
-            </a:r>
-            <a:br/>
-            <a:br/>
-            <a:r>
-              <a:t># Inside container (demo install):</a:t>
-            </a:r>
-            <a:br/>
-            <a:r>
-              <a:t>apt-get update</a:t>
-            </a:r>
-            <a:br/>
-            <a:r>
-              <a:t>DEBIAN_FRONTEND=noninteractive apt-get install -y fastqc bwa samtools default-jre</a:t>
-            </a:r>
-            <a:br/>
-            <a:r>
-              <a:t>fastqc --version; bwa 2&gt;&amp;1 | head -n 1; samtools --version | head -n 1</a:t>
-            </a:r>
-            <a:br/>
-            <a:r>
-              <a:t>exit</a:t>
-            </a:r>
-            <a:br/>
-            <a:br/>
-            <a:r>
-              <a:t># Minimal Dockerfile (save as docker/Dockerfile)</a:t>
-            </a:r>
-            <a:br/>
-            <a:r>
-              <a:t># ----------------------------------------------</a:t>
-            </a:r>
-            <a:br/>
-            <a:r>
-              <a:t># FROM ubuntu:22.04</a:t>
-            </a:r>
-            <a:br/>
-            <a:r>
-              <a:t># RUN apt-get update &amp;&amp; DEBIAN_FRONTEND=noninteractive apt-get install -y --no-install-recommends \</a:t>
-            </a:r>
-            <a:br/>
-            <a:r>
-              <a:t>#     fastqc bwa samtools default-jre ca-certificates &amp;&amp; \</a:t>
-            </a:r>
-            <a:br/>
-            <a:r>
-              <a:t>#     apt-get clean &amp;&amp; rm -rf /var/lib/apt/lists/*</a:t>
-            </a:r>
-            <a:br/>
-            <a:r>
-              <a:t># WORKDIR /work</a:t>
-            </a:r>
-            <a:br/>
-            <a:br/>
-            <a:r>
-              <a:t># Build and run</a:t>
-            </a:r>
-            <a:br/>
-            <a:r>
-              <a:t>docker build -t bioenv:tools docker/</a:t>
-            </a:r>
-            <a:br/>
-            <a:r>
-              <a:t>docker run --rm -v "$PWD":/work -w /work bioenv:tools fastqc --version</a:t>
-            </a:r>
-            <a:br/>
-            <a:endParaRPr/>
+            <a:endParaRPr lang="en-US" sz="1300" dirty="0"/>
           </a:p>
         </p:txBody>
       </p:sp>
     </p:spTree>
+    <p:extLst>
+      <p:ext uri="{BB962C8B-B14F-4D97-AF65-F5344CB8AC3E}">
+        <p14:creationId xmlns:p14="http://schemas.microsoft.com/office/powerpoint/2010/main" val="3581923923"/>
+      </p:ext>
+    </p:extLst>
   </p:cSld>
   <p:clrMapOvr>
     <a:masterClrMapping/>

--- a/module-02-environments/slides/Week2_EnvMgmt_Bioinformatics.pptx
+++ b/module-02-environments/slides/Week2_EnvMgmt_Bioinformatics.pptx
@@ -9477,7 +9477,7 @@
           <a:p>
             <a:fld id="{5BCAD085-E8A6-8845-BD4E-CB4CCA059FC4}" type="datetimeFigureOut">
               <a:rPr lang="en-US" smtClean="0"/>
-              <a:t>9/29/25</a:t>
+              <a:t>9/30/25</a:t>
             </a:fld>
             <a:endParaRPr lang="en-US"/>
           </a:p>
@@ -9645,7 +9645,7 @@
           <a:p>
             <a:fld id="{5BCAD085-E8A6-8845-BD4E-CB4CCA059FC4}" type="datetimeFigureOut">
               <a:rPr lang="en-US" smtClean="0"/>
-              <a:t>9/29/25</a:t>
+              <a:t>9/30/25</a:t>
             </a:fld>
             <a:endParaRPr lang="en-US"/>
           </a:p>
@@ -9823,7 +9823,7 @@
           <a:p>
             <a:fld id="{5BCAD085-E8A6-8845-BD4E-CB4CCA059FC4}" type="datetimeFigureOut">
               <a:rPr lang="en-US" smtClean="0"/>
-              <a:t>9/29/25</a:t>
+              <a:t>9/30/25</a:t>
             </a:fld>
             <a:endParaRPr lang="en-US"/>
           </a:p>
@@ -9991,7 +9991,7 @@
           <a:p>
             <a:fld id="{5BCAD085-E8A6-8845-BD4E-CB4CCA059FC4}" type="datetimeFigureOut">
               <a:rPr lang="en-US" smtClean="0"/>
-              <a:t>9/29/25</a:t>
+              <a:t>9/30/25</a:t>
             </a:fld>
             <a:endParaRPr lang="en-US"/>
           </a:p>
@@ -10236,7 +10236,7 @@
           <a:p>
             <a:fld id="{5BCAD085-E8A6-8845-BD4E-CB4CCA059FC4}" type="datetimeFigureOut">
               <a:rPr lang="en-US" smtClean="0"/>
-              <a:t>9/29/25</a:t>
+              <a:t>9/30/25</a:t>
             </a:fld>
             <a:endParaRPr lang="en-US"/>
           </a:p>
@@ -10521,7 +10521,7 @@
           <a:p>
             <a:fld id="{5BCAD085-E8A6-8845-BD4E-CB4CCA059FC4}" type="datetimeFigureOut">
               <a:rPr lang="en-US" smtClean="0"/>
-              <a:t>9/29/25</a:t>
+              <a:t>9/30/25</a:t>
             </a:fld>
             <a:endParaRPr lang="en-US"/>
           </a:p>
@@ -10940,7 +10940,7 @@
           <a:p>
             <a:fld id="{5BCAD085-E8A6-8845-BD4E-CB4CCA059FC4}" type="datetimeFigureOut">
               <a:rPr lang="en-US" smtClean="0"/>
-              <a:t>9/29/25</a:t>
+              <a:t>9/30/25</a:t>
             </a:fld>
             <a:endParaRPr lang="en-US"/>
           </a:p>
@@ -11057,7 +11057,7 @@
           <a:p>
             <a:fld id="{5BCAD085-E8A6-8845-BD4E-CB4CCA059FC4}" type="datetimeFigureOut">
               <a:rPr lang="en-US" smtClean="0"/>
-              <a:t>9/29/25</a:t>
+              <a:t>9/30/25</a:t>
             </a:fld>
             <a:endParaRPr lang="en-US"/>
           </a:p>
@@ -11152,7 +11152,7 @@
           <a:p>
             <a:fld id="{5BCAD085-E8A6-8845-BD4E-CB4CCA059FC4}" type="datetimeFigureOut">
               <a:rPr lang="en-US" smtClean="0"/>
-              <a:t>9/29/25</a:t>
+              <a:t>9/30/25</a:t>
             </a:fld>
             <a:endParaRPr lang="en-US"/>
           </a:p>
@@ -11427,7 +11427,7 @@
           <a:p>
             <a:fld id="{5BCAD085-E8A6-8845-BD4E-CB4CCA059FC4}" type="datetimeFigureOut">
               <a:rPr lang="en-US" smtClean="0"/>
-              <a:t>9/29/25</a:t>
+              <a:t>9/30/25</a:t>
             </a:fld>
             <a:endParaRPr lang="en-US"/>
           </a:p>
@@ -11679,7 +11679,7 @@
           <a:p>
             <a:fld id="{5BCAD085-E8A6-8845-BD4E-CB4CCA059FC4}" type="datetimeFigureOut">
               <a:rPr lang="en-US" smtClean="0"/>
-              <a:t>9/29/25</a:t>
+              <a:t>9/30/25</a:t>
             </a:fld>
             <a:endParaRPr lang="en-US"/>
           </a:p>
@@ -11890,7 +11890,7 @@
           <a:p>
             <a:fld id="{5BCAD085-E8A6-8845-BD4E-CB4CCA059FC4}" type="datetimeFigureOut">
               <a:rPr lang="en-US" smtClean="0"/>
-              <a:t>9/29/25</a:t>
+              <a:t>9/30/25</a:t>
             </a:fld>
             <a:endParaRPr lang="en-US"/>
           </a:p>
@@ -14981,7 +14981,7 @@
         </p:nvSpPr>
         <p:spPr>
           <a:xfrm>
-            <a:off x="1005840" y="3291840"/>
+            <a:off x="1390850" y="3338928"/>
             <a:ext cx="10454335" cy="2062103"/>
           </a:xfrm>
           <a:prstGeom prst="rect">
@@ -15032,7 +15032,7 @@
             </a:r>
             <a:r>
               <a:rPr dirty="0"/>
-              <a:t>=0.12.* </a:t>
+              <a:t> </a:t>
             </a:r>
             <a:r>
               <a:rPr dirty="0" err="1"/>
@@ -15040,7 +15040,7 @@
             </a:r>
             <a:r>
               <a:rPr dirty="0"/>
-              <a:t>=1.* -c </a:t>
+              <a:t> -c </a:t>
             </a:r>
             <a:r>
               <a:rPr dirty="0" err="1"/>
@@ -15442,7 +15442,7 @@
         </p:nvSpPr>
         <p:spPr>
           <a:xfrm>
-            <a:off x="1289304" y="2902913"/>
+            <a:off x="1347313" y="1288428"/>
             <a:ext cx="9849751" cy="3032168"/>
           </a:xfrm>
           <a:prstGeom prst="rect">
@@ -15485,12 +15485,16 @@
               <a:rPr lang="en-US" sz="1300" dirty="0" err="1"/>
               <a:t>SAMtools</a:t>
             </a:r>
+            <a:r>
+              <a:rPr lang="en-US" sz="1300" dirty="0"/>
+              <a:t> (3 tools) </a:t>
+            </a:r>
             <a:br>
               <a:rPr lang="en-US" sz="1300" dirty="0"/>
             </a:br>
             <a:r>
               <a:rPr lang="en-US" sz="1300" dirty="0"/>
-              <a:t>mamba create -n assembly spades=3.15.* bwa=0.7.* </a:t>
+              <a:t>mamba create -n assembly spades bwa </a:t>
             </a:r>
             <a:r>
               <a:rPr lang="en-US" sz="1300" dirty="0" err="1"/>
@@ -15498,7 +15502,7 @@
             </a:r>
             <a:r>
               <a:rPr lang="en-US" sz="1300" dirty="0"/>
-              <a:t>=1.* -c </a:t>
+              <a:t> -c </a:t>
             </a:r>
             <a:r>
               <a:rPr lang="en-US" sz="1300" dirty="0" err="1"/>
@@ -15581,6 +15585,10 @@
               <a:rPr lang="en-US" sz="1300" dirty="0" err="1"/>
               <a:t>Prokka</a:t>
             </a:r>
+            <a:r>
+              <a:rPr lang="en-US" sz="1300" dirty="0"/>
+              <a:t> (tool)</a:t>
+            </a:r>
             <a:br>
               <a:rPr lang="en-US" sz="1300" dirty="0"/>
             </a:br>
@@ -15594,7 +15602,7 @@
             </a:r>
             <a:r>
               <a:rPr lang="en-US" sz="1300" dirty="0"/>
-              <a:t>=1.14.* -c </a:t>
+              <a:t> -c </a:t>
             </a:r>
             <a:r>
               <a:rPr lang="en-US" sz="1300" dirty="0" err="1"/>
